--- a/medical_accident_its_analysis/manuscript/bpp_supplementary_figures.pptx
+++ b/medical_accident_its_analysis/manuscript/bpp_supplementary_figures.pptx
@@ -6238,7 +6238,7 @@
           <a:p>
             <a:r>
               <a:rPr sz="1400"/>
-              <a:t>Closed malpractice claims per 1,000 physicians by specialty, 2008–2024 (rates, not counts).</a:t>
+              <a:t>Closed malpractice claims per 1,000 physicians by specialty, 2008-2024 (rates, not counts).</a:t>
             </a:r>
           </a:p>
         </p:txBody>

--- a/medical_accident_its_analysis/manuscript/bpp_supplementary_figures.pptx
+++ b/medical_accident_its_analysis/manuscript/bpp_supplementary_figures.pptx
@@ -332,7 +332,7 @@
           <a:p>
             <a:fld id="{C1FF6DA9-008F-8B48-92A6-B652298478BF}" type="slidenum">
               <a:rPr lang="en-US" smtClean="0"/>
-              <a:t>‹#›</a:t>
+              <a:t>#</a:t>
             </a:fld>
             <a:endParaRPr lang="en-US"/>
           </a:p>
@@ -574,7 +574,7 @@
           <a:p>
             <a:fld id="{C1FF6DA9-008F-8B48-92A6-B652298478BF}" type="slidenum">
               <a:rPr lang="en-US" smtClean="0"/>
-              <a:t>‹#›</a:t>
+              <a:t>#</a:t>
             </a:fld>
             <a:endParaRPr lang="en-US"/>
           </a:p>
@@ -744,7 +744,7 @@
           <a:p>
             <a:fld id="{C1FF6DA9-008F-8B48-92A6-B652298478BF}" type="slidenum">
               <a:rPr lang="en-US" smtClean="0"/>
-              <a:t>‹#›</a:t>
+              <a:t>#</a:t>
             </a:fld>
             <a:endParaRPr lang="en-US"/>
           </a:p>
@@ -914,7 +914,7 @@
           <a:p>
             <a:fld id="{C1FF6DA9-008F-8B48-92A6-B652298478BF}" type="slidenum">
               <a:rPr lang="en-US" smtClean="0"/>
-              <a:t>‹#›</a:t>
+              <a:t>#</a:t>
             </a:fld>
             <a:endParaRPr lang="en-US"/>
           </a:p>
@@ -1094,7 +1094,7 @@
           <a:p>
             <a:fld id="{C1FF6DA9-008F-8B48-92A6-B652298478BF}" type="slidenum">
               <a:rPr lang="en-US" smtClean="0"/>
-              <a:t>‹#›</a:t>
+              <a:t>#</a:t>
             </a:fld>
             <a:endParaRPr lang="en-US"/>
           </a:p>
@@ -1274,7 +1274,7 @@
           <a:p>
             <a:fld id="{C1FF6DA9-008F-8B48-92A6-B652298478BF}" type="slidenum">
               <a:rPr lang="en-US" smtClean="0"/>
-              <a:t>‹#›</a:t>
+              <a:t>#</a:t>
             </a:fld>
             <a:endParaRPr lang="en-US"/>
           </a:p>
@@ -1444,7 +1444,7 @@
           <a:p>
             <a:fld id="{C1FF6DA9-008F-8B48-92A6-B652298478BF}" type="slidenum">
               <a:rPr lang="en-US" smtClean="0"/>
-              <a:t>‹#›</a:t>
+              <a:t>#</a:t>
             </a:fld>
             <a:endParaRPr lang="en-US"/>
           </a:p>
@@ -1614,7 +1614,7 @@
           <a:p>
             <a:fld id="{C1FF6DA9-008F-8B48-92A6-B652298478BF}" type="slidenum">
               <a:rPr lang="en-US" smtClean="0"/>
-              <a:t>‹#›</a:t>
+              <a:t>#</a:t>
             </a:fld>
             <a:endParaRPr lang="en-US"/>
           </a:p>
@@ -1860,7 +1860,7 @@
           <a:p>
             <a:fld id="{C1FF6DA9-008F-8B48-92A6-B652298478BF}" type="slidenum">
               <a:rPr lang="en-US" smtClean="0"/>
-              <a:t>‹#›</a:t>
+              <a:t>#</a:t>
             </a:fld>
             <a:endParaRPr lang="en-US"/>
           </a:p>
@@ -2106,7 +2106,7 @@
           <a:p>
             <a:fld id="{C1FF6DA9-008F-8B48-92A6-B652298478BF}" type="slidenum">
               <a:rPr lang="en-US" smtClean="0"/>
-              <a:t>‹#›</a:t>
+              <a:t>#</a:t>
             </a:fld>
             <a:endParaRPr lang="en-US"/>
           </a:p>
@@ -2394,7 +2394,7 @@
           <a:p>
             <a:fld id="{C1FF6DA9-008F-8B48-92A6-B652298478BF}" type="slidenum">
               <a:rPr lang="en-US" smtClean="0"/>
-              <a:t>‹#›</a:t>
+              <a:t>#</a:t>
             </a:fld>
             <a:endParaRPr lang="en-US"/>
           </a:p>
@@ -2682,7 +2682,7 @@
           <a:p>
             <a:fld id="{C1FF6DA9-008F-8B48-92A6-B652298478BF}" type="slidenum">
               <a:rPr lang="en-US" smtClean="0"/>
-              <a:t>‹#›</a:t>
+              <a:t>#</a:t>
             </a:fld>
             <a:endParaRPr lang="en-US"/>
           </a:p>
@@ -3104,7 +3104,7 @@
           <a:p>
             <a:fld id="{C1FF6DA9-008F-8B48-92A6-B652298478BF}" type="slidenum">
               <a:rPr lang="en-US" smtClean="0"/>
-              <a:t>‹#›</a:t>
+              <a:t>#</a:t>
             </a:fld>
             <a:endParaRPr lang="en-US"/>
           </a:p>
@@ -3526,7 +3526,7 @@
           <a:p>
             <a:fld id="{C1FF6DA9-008F-8B48-92A6-B652298478BF}" type="slidenum">
               <a:rPr lang="en-US" smtClean="0"/>
-              <a:t>‹#›</a:t>
+              <a:t>#</a:t>
             </a:fld>
             <a:endParaRPr lang="en-US"/>
           </a:p>
@@ -3644,7 +3644,7 @@
           <a:p>
             <a:fld id="{C1FF6DA9-008F-8B48-92A6-B652298478BF}" type="slidenum">
               <a:rPr lang="en-US" smtClean="0"/>
-              <a:t>‹#›</a:t>
+              <a:t>#</a:t>
             </a:fld>
             <a:endParaRPr lang="en-US"/>
           </a:p>
@@ -3762,7 +3762,7 @@
           <a:p>
             <a:fld id="{C1FF6DA9-008F-8B48-92A6-B652298478BF}" type="slidenum">
               <a:rPr lang="en-US" smtClean="0"/>
-              <a:t>‹#›</a:t>
+              <a:t>#</a:t>
             </a:fld>
             <a:endParaRPr lang="en-US"/>
           </a:p>
@@ -3857,7 +3857,7 @@
           <a:p>
             <a:fld id="{C1FF6DA9-008F-8B48-92A6-B652298478BF}" type="slidenum">
               <a:rPr lang="en-US" smtClean="0"/>
-              <a:t>‹#›</a:t>
+              <a:t>#</a:t>
             </a:fld>
             <a:endParaRPr lang="en-US"/>
           </a:p>
@@ -3952,7 +3952,7 @@
           <a:p>
             <a:fld id="{C1FF6DA9-008F-8B48-92A6-B652298478BF}" type="slidenum">
               <a:rPr lang="en-US" smtClean="0"/>
-              <a:t>‹#›</a:t>
+              <a:t>#</a:t>
             </a:fld>
             <a:endParaRPr lang="en-US"/>
           </a:p>
@@ -4229,7 +4229,7 @@
           <a:p>
             <a:fld id="{C1FF6DA9-008F-8B48-92A6-B652298478BF}" type="slidenum">
               <a:rPr lang="en-US" smtClean="0"/>
-              <a:t>‹#›</a:t>
+              <a:t>#</a:t>
             </a:fld>
             <a:endParaRPr lang="en-US"/>
           </a:p>
@@ -4506,7 +4506,7 @@
           <a:p>
             <a:fld id="{C1FF6DA9-008F-8B48-92A6-B652298478BF}" type="slidenum">
               <a:rPr lang="en-US" smtClean="0"/>
-              <a:t>‹#›</a:t>
+              <a:t>#</a:t>
             </a:fld>
             <a:endParaRPr lang="en-US"/>
           </a:p>
@@ -4759,7 +4759,7 @@
           <a:p>
             <a:fld id="{C1FF6DA9-008F-8B48-92A6-B652298478BF}" type="slidenum">
               <a:rPr lang="en-US" smtClean="0"/>
-              <a:t>‹#›</a:t>
+              <a:t>#</a:t>
             </a:fld>
             <a:endParaRPr lang="en-US"/>
           </a:p>
@@ -5012,7 +5012,7 @@
           <a:p>
             <a:fld id="{C1FF6DA9-008F-8B48-92A6-B652298478BF}" type="slidenum">
               <a:rPr lang="en-US" smtClean="0"/>
-              <a:t>‹#›</a:t>
+              <a:t>#</a:t>
             </a:fld>
             <a:endParaRPr lang="en-US"/>
           </a:p>
@@ -5261,7 +5261,7 @@
           <a:p>
             <a:fld id="{C1FF6DA9-008F-8B48-92A6-B652298478BF}" type="slidenum">
               <a:rPr lang="en-US" smtClean="0"/>
-              <a:t>‹#›</a:t>
+              <a:t>#</a:t>
             </a:fld>
             <a:endParaRPr lang="en-US"/>
           </a:p>
@@ -5311,7 +5311,7 @@
           <a:spcPct val="20000"/>
         </a:spcBef>
         <a:buFont typeface="Arial"/>
-        <a:buChar char="•"/>
+        <a:buChar char="*"/>
         <a:defRPr sz="3200" kern="1200">
           <a:solidFill>
             <a:schemeClr val="tx1"/>
@@ -5326,7 +5326,7 @@
           <a:spcPct val="20000"/>
         </a:spcBef>
         <a:buFont typeface="Arial"/>
-        <a:buChar char="–"/>
+        <a:buChar char="-"/>
         <a:defRPr sz="2800" kern="1200">
           <a:solidFill>
             <a:schemeClr val="tx1"/>
@@ -5341,7 +5341,7 @@
           <a:spcPct val="20000"/>
         </a:spcBef>
         <a:buFont typeface="Arial"/>
-        <a:buChar char="•"/>
+        <a:buChar char="*"/>
         <a:defRPr sz="2400" kern="1200">
           <a:solidFill>
             <a:schemeClr val="tx1"/>
@@ -5356,7 +5356,7 @@
           <a:spcPct val="20000"/>
         </a:spcBef>
         <a:buFont typeface="Arial"/>
-        <a:buChar char="–"/>
+        <a:buChar char="-"/>
         <a:defRPr sz="2000" kern="1200">
           <a:solidFill>
             <a:schemeClr val="tx1"/>
@@ -5371,7 +5371,7 @@
           <a:spcPct val="20000"/>
         </a:spcBef>
         <a:buFont typeface="Arial"/>
-        <a:buChar char="»"/>
+        <a:buChar char="&gt;&gt;"/>
         <a:defRPr sz="2000" kern="1200">
           <a:solidFill>
             <a:schemeClr val="tx1"/>
@@ -5386,7 +5386,7 @@
           <a:spcPct val="20000"/>
         </a:spcBef>
         <a:buFont typeface="Arial"/>
-        <a:buChar char="•"/>
+        <a:buChar char="*"/>
         <a:defRPr sz="2000" kern="1200">
           <a:solidFill>
             <a:schemeClr val="tx1"/>
@@ -5401,7 +5401,7 @@
           <a:spcPct val="20000"/>
         </a:spcBef>
         <a:buFont typeface="Arial"/>
-        <a:buChar char="•"/>
+        <a:buChar char="*"/>
         <a:defRPr sz="2000" kern="1200">
           <a:solidFill>
             <a:schemeClr val="tx1"/>
@@ -5416,7 +5416,7 @@
           <a:spcPct val="20000"/>
         </a:spcBef>
         <a:buFont typeface="Arial"/>
-        <a:buChar char="•"/>
+        <a:buChar char="*"/>
         <a:defRPr sz="2000" kern="1200">
           <a:solidFill>
             <a:schemeClr val="tx1"/>
@@ -5431,7 +5431,7 @@
           <a:spcPct val="20000"/>
         </a:spcBef>
         <a:buFont typeface="Arial"/>
-        <a:buChar char="•"/>
+        <a:buChar char="*"/>
         <a:defRPr sz="2000" kern="1200">
           <a:solidFill>
             <a:schemeClr val="tx1"/>
@@ -5771,7 +5771,7 @@
           <a:p>
             <a:fld id="{C1FF6DA9-008F-8B48-92A6-B652298478BF}" type="slidenum">
               <a:rPr lang="en-US" smtClean="0"/>
-              <a:t>‹#›</a:t>
+              <a:t>#</a:t>
             </a:fld>
             <a:endParaRPr lang="en-US"/>
           </a:p>
@@ -5821,7 +5821,7 @@
           <a:spcPct val="20000"/>
         </a:spcBef>
         <a:buFont typeface="Arial"/>
-        <a:buChar char="•"/>
+        <a:buChar char="*"/>
         <a:defRPr sz="3200" kern="1200">
           <a:solidFill>
             <a:schemeClr val="tx1"/>
@@ -5836,7 +5836,7 @@
           <a:spcPct val="20000"/>
         </a:spcBef>
         <a:buFont typeface="Arial"/>
-        <a:buChar char="–"/>
+        <a:buChar char="-"/>
         <a:defRPr sz="2800" kern="1200">
           <a:solidFill>
             <a:schemeClr val="tx1"/>
@@ -5851,7 +5851,7 @@
           <a:spcPct val="20000"/>
         </a:spcBef>
         <a:buFont typeface="Arial"/>
-        <a:buChar char="•"/>
+        <a:buChar char="*"/>
         <a:defRPr sz="2400" kern="1200">
           <a:solidFill>
             <a:schemeClr val="tx1"/>
@@ -5866,7 +5866,7 @@
           <a:spcPct val="20000"/>
         </a:spcBef>
         <a:buFont typeface="Arial"/>
-        <a:buChar char="–"/>
+        <a:buChar char="-"/>
         <a:defRPr sz="2000" kern="1200">
           <a:solidFill>
             <a:schemeClr val="tx1"/>
@@ -5881,7 +5881,7 @@
           <a:spcPct val="20000"/>
         </a:spcBef>
         <a:buFont typeface="Arial"/>
-        <a:buChar char="»"/>
+        <a:buChar char="&gt;&gt;"/>
         <a:defRPr sz="2000" kern="1200">
           <a:solidFill>
             <a:schemeClr val="tx1"/>
@@ -5896,7 +5896,7 @@
           <a:spcPct val="20000"/>
         </a:spcBef>
         <a:buFont typeface="Arial"/>
-        <a:buChar char="•"/>
+        <a:buChar char="*"/>
         <a:defRPr sz="2000" kern="1200">
           <a:solidFill>
             <a:schemeClr val="tx1"/>
@@ -5911,7 +5911,7 @@
           <a:spcPct val="20000"/>
         </a:spcBef>
         <a:buFont typeface="Arial"/>
-        <a:buChar char="•"/>
+        <a:buChar char="*"/>
         <a:defRPr sz="2000" kern="1200">
           <a:solidFill>
             <a:schemeClr val="tx1"/>
@@ -5926,7 +5926,7 @@
           <a:spcPct val="20000"/>
         </a:spcBef>
         <a:buFont typeface="Arial"/>
-        <a:buChar char="•"/>
+        <a:buChar char="*"/>
         <a:defRPr sz="2000" kern="1200">
           <a:solidFill>
             <a:schemeClr val="tx1"/>
@@ -5941,7 +5941,7 @@
           <a:spcPct val="20000"/>
         </a:spcBef>
         <a:buFont typeface="Arial"/>
-        <a:buChar char="•"/>
+        <a:buChar char="*"/>
         <a:defRPr sz="2000" kern="1200">
           <a:solidFill>
             <a:schemeClr val="tx1"/>
@@ -6397,10 +6397,10 @@
         <a:latin typeface="Calibri"/>
         <a:ea typeface=""/>
         <a:cs typeface=""/>
-        <a:font script="Jpan" typeface="ＭＳ Ｐゴシック"/>
-        <a:font script="Hang" typeface="맑은 고딕"/>
-        <a:font script="Hans" typeface="宋体"/>
-        <a:font script="Hant" typeface="新細明體"/>
+        <a:font script="Jpan" typeface="MS PGothic"/>
+        <a:font script="Hang" typeface="Malgun Gothic"/>
+        <a:font script="Hans" typeface="SimSun"/>
+        <a:font script="Hant" typeface="PMingLiU"/>
         <a:font script="Arab" typeface="Times New Roman"/>
         <a:font script="Hebr" typeface="Times New Roman"/>
         <a:font script="Thai" typeface="Angsana New"/>
@@ -6432,10 +6432,10 @@
         <a:latin typeface="Calibri"/>
         <a:ea typeface=""/>
         <a:cs typeface=""/>
-        <a:font script="Jpan" typeface="ＭＳ Ｐゴシック"/>
-        <a:font script="Hang" typeface="맑은 고딕"/>
-        <a:font script="Hans" typeface="宋体"/>
-        <a:font script="Hant" typeface="新細明體"/>
+        <a:font script="Jpan" typeface="MS PGothic"/>
+        <a:font script="Hang" typeface="Malgun Gothic"/>
+        <a:font script="Hans" typeface="SimSun"/>
+        <a:font script="Hant" typeface="PMingLiU"/>
         <a:font script="Arab" typeface="Arial"/>
         <a:font script="Hebr" typeface="Arial"/>
         <a:font script="Thai" typeface="Cordia New"/>
@@ -6717,10 +6717,10 @@
         <a:latin typeface="Calibri"/>
         <a:ea typeface=""/>
         <a:cs typeface=""/>
-        <a:font script="Jpan" typeface="ＭＳ Ｐゴシック"/>
-        <a:font script="Hang" typeface="맑은 고딕"/>
-        <a:font script="Hans" typeface="宋体"/>
-        <a:font script="Hant" typeface="新細明體"/>
+        <a:font script="Jpan" typeface="MS PGothic"/>
+        <a:font script="Hang" typeface="Malgun Gothic"/>
+        <a:font script="Hans" typeface="SimSun"/>
+        <a:font script="Hant" typeface="PMingLiU"/>
         <a:font script="Arab" typeface="Times New Roman"/>
         <a:font script="Hebr" typeface="Times New Roman"/>
         <a:font script="Thai" typeface="Angsana New"/>
@@ -6752,10 +6752,10 @@
         <a:latin typeface="Calibri"/>
         <a:ea typeface=""/>
         <a:cs typeface=""/>
-        <a:font script="Jpan" typeface="ＭＳ Ｐゴシック"/>
-        <a:font script="Hang" typeface="맑은 고딕"/>
-        <a:font script="Hans" typeface="宋体"/>
-        <a:font script="Hant" typeface="新細明體"/>
+        <a:font script="Jpan" typeface="MS PGothic"/>
+        <a:font script="Hang" typeface="Malgun Gothic"/>
+        <a:font script="Hans" typeface="SimSun"/>
+        <a:font script="Hant" typeface="PMingLiU"/>
         <a:font script="Arab" typeface="Arial"/>
         <a:font script="Hebr" typeface="Arial"/>
         <a:font script="Thai" typeface="Cordia New"/>

--- a/medical_accident_its_analysis/manuscript/bpp_supplementary_figures.pptx
+++ b/medical_accident_its_analysis/manuscript/bpp_supplementary_figures.pptx
@@ -6138,7 +6138,7 @@
           <a:p>
             <a:r>
               <a:rPr sz="1400"/>
-              <a:t>Sensitivity-analysis framework for evaluating malpractice-litigation risk as a healthcare workforce-allocation lever.</a:t>
+              <a:t>Sensitivity-analysis framework for evaluating malpractice-litigation risk as a healthcare workforce-allocation instrument.</a:t>
             </a:r>
           </a:p>
         </p:txBody>

--- a/medical_accident_its_analysis/manuscript/bpp_supplementary_figures.pptx
+++ b/medical_accident_its_analysis/manuscript/bpp_supplementary_figures.pptx
@@ -5371,7 +5371,7 @@
           <a:spcPct val="20000"/>
         </a:spcBef>
         <a:buFont typeface="Arial"/>
-        <a:buChar char="&gt;&gt;"/>
+        <a:buChar char="»"/>
         <a:defRPr sz="2000" kern="1200">
           <a:solidFill>
             <a:schemeClr val="tx1"/>
@@ -5881,7 +5881,7 @@
           <a:spcPct val="20000"/>
         </a:spcBef>
         <a:buFont typeface="Arial"/>
-        <a:buChar char="&gt;&gt;"/>
+        <a:buChar char="»"/>
         <a:defRPr sz="2000" kern="1200">
           <a:solidFill>
             <a:schemeClr val="tx1"/>
